--- a/src/reports/report-templates/june-2026/mimosa-29-June-2026.pptx
+++ b/src/reports/report-templates/june-2026/mimosa-29-June-2026.pptx
@@ -26,6 +26,7 @@
     <p:sldId id="264" r:id="rId15"/>
     <p:sldId id="275" r:id="rId16"/>
     <p:sldId id="268" r:id="rId17"/>
+    <p:sldId id="279" r:id="rId19"/>
   </p:sldIdLst>
   <p:sldSz cx="9144000" cy="5149850"/>
   <p:notesSz cx="9144000" cy="5149850"/>
@@ -7174,6 +7175,286 @@
 </file>
 
 <file path=ppt/slides/slide15.xml><?xml version="1.0" encoding="utf-8"?>
+<p:sld xmlns:a="http://schemas.openxmlformats.org/drawingml/2006/main" xmlns:p="http://schemas.openxmlformats.org/presentationml/2006/main" xmlns:r="http://schemas.openxmlformats.org/officeDocument/2006/relationships">
+  <p:cSld>
+    <p:spTree>
+      <p:nvGrpSpPr>
+        <p:cNvPr id="1" name=""/>
+        <p:cNvGrpSpPr/>
+        <p:nvPr/>
+      </p:nvGrpSpPr>
+      <p:grpSpPr/>
+      <p:sp>
+        <p:nvSpPr>
+          <p:cNvPr id="2" name="object 2"/>
+          <p:cNvSpPr txBox="1">
+            <a:spLocks noGrp="1"/>
+          </p:cNvSpPr>
+          <p:nvPr>
+            <p:ph type="title"/>
+          </p:nvPr>
+        </p:nvSpPr>
+        <p:spPr>
+          <a:xfrm>
+            <a:off x="401612" y="346709"/>
+            <a:ext cx="2722588" cy="334707"/>
+          </a:xfrm>
+          <a:prstGeom prst="rect">
+            <a:avLst/>
+          </a:prstGeom>
+        </p:spPr>
+        <p:txBody>
+          <a:bodyPr vert="horz" wrap="square" lIns="0" tIns="11430" rIns="0" bIns="0" rtlCol="0">
+            <a:spAutoFit/>
+          </a:bodyPr>
+          <a:lstStyle/>
+          <a:p>
+            <a:pPr marL="12700">
+              <a:lnSpc>
+                <a:spcPct val="100000"/>
+              </a:lnSpc>
+              <a:spcBef>
+                <a:spcPts val="90"/>
+              </a:spcBef>
+            </a:pPr>
+            <a:r>
+              <a:rPr spc="60">
+                <a:latin typeface="Raleway" pitchFamily="2" charset="77"/>
+                <a:cs typeface="Times New Roman" panose="02020603050405020304"/>
+              </a:rPr>
+              <a:t>Recommendations</a:t>
+            </a:r>
+            <a:endParaRPr spc="60">
+              <a:latin typeface="Raleway" pitchFamily="2" charset="77"/>
+              <a:cs typeface="Times New Roman" panose="02020603050405020304"/>
+            </a:endParaRPr>
+          </a:p>
+        </p:txBody>
+      </p:sp>
+      <p:sp>
+        <p:nvSpPr>
+          <p:cNvPr id="3" name="object 3"/>
+          <p:cNvSpPr txBox="1"/>
+          <p:nvPr/>
+        </p:nvSpPr>
+        <p:spPr>
+          <a:xfrm>
+            <a:off x="616660" y="745680"/>
+            <a:ext cx="3817709" cy="212238"/>
+          </a:xfrm>
+          <a:prstGeom prst="rect">
+            <a:avLst/>
+          </a:prstGeom>
+        </p:spPr>
+        <p:txBody>
+          <a:bodyPr vert="horz" wrap="square" lIns="0" tIns="12065" rIns="0" bIns="0" rtlCol="0" anchor="t">
+            <a:spAutoFit/>
+          </a:bodyPr>
+          <a:lstStyle/>
+          <a:p/>
+        </p:txBody>
+      </p:sp>
+      <p:grpSp>
+        <p:nvGrpSpPr>
+          <p:cNvPr id="4" name="object 4"/>
+          <p:cNvGrpSpPr/>
+          <p:nvPr/>
+        </p:nvGrpSpPr>
+        <p:grpSpPr>
+          <a:xfrm>
+            <a:off x="152400" y="1117600"/>
+            <a:ext cx="5112385" cy="3714750"/>
+            <a:chOff x="222076" y="1217269"/>
+            <a:chExt cx="5182282" cy="3469004"/>
+          </a:xfrm>
+        </p:grpSpPr>
+        <p:sp>
+          <p:nvSpPr>
+            <p:cNvPr id="5" name="object 5"/>
+            <p:cNvSpPr/>
+            <p:nvPr/>
+          </p:nvSpPr>
+          <p:spPr>
+            <a:xfrm>
+              <a:off x="429768" y="1217269"/>
+              <a:ext cx="4974590" cy="3469004"/>
+            </a:xfrm>
+            <a:custGeom>
+              <a:avLst/>
+              <a:gdLst/>
+              <a:ahLst/>
+              <a:cxnLst/>
+              <a:rect l="l" t="t" r="r" b="b"/>
+              <a:pathLst>
+                <a:path w="4974590" h="3469004">
+                  <a:moveTo>
+                    <a:pt x="4974335" y="0"/>
+                  </a:moveTo>
+                  <a:lnTo>
+                    <a:pt x="0" y="0"/>
+                  </a:lnTo>
+                  <a:lnTo>
+                    <a:pt x="0" y="3468624"/>
+                  </a:lnTo>
+                  <a:lnTo>
+                    <a:pt x="4974335" y="3468624"/>
+                  </a:lnTo>
+                  <a:lnTo>
+                    <a:pt x="4974335" y="0"/>
+                  </a:lnTo>
+                  <a:close/>
+                </a:path>
+              </a:pathLst>
+            </a:custGeom>
+            <a:solidFill>
+              <a:srgbClr val="F8F9FB"/>
+            </a:solidFill>
+          </p:spPr>
+          <p:txBody>
+            <a:bodyPr wrap="square" lIns="0" tIns="0" rIns="0" bIns="0" rtlCol="0"/>
+            <a:lstStyle/>
+            <a:p>
+              <a:endParaRPr>
+                <a:latin typeface="Raleway" pitchFamily="2" charset="77"/>
+                <a:cs typeface="Times New Roman" panose="02020603050405020304"/>
+              </a:endParaRPr>
+            </a:p>
+          </p:txBody>
+        </p:sp>
+        <p:sp>
+          <p:nvSpPr>
+            <p:cNvPr id="6" name="object 6"/>
+            <p:cNvSpPr/>
+            <p:nvPr/>
+          </p:nvSpPr>
+          <p:spPr>
+            <a:xfrm>
+              <a:off x="222076" y="1217269"/>
+              <a:ext cx="27940" cy="3469004"/>
+            </a:xfrm>
+            <a:custGeom>
+              <a:avLst/>
+              <a:gdLst/>
+              <a:ahLst/>
+              <a:cxnLst/>
+              <a:rect l="l" t="t" r="r" b="b"/>
+              <a:pathLst>
+                <a:path w="27940" h="3469004">
+                  <a:moveTo>
+                    <a:pt x="27431" y="0"/>
+                  </a:moveTo>
+                  <a:lnTo>
+                    <a:pt x="0" y="0"/>
+                  </a:lnTo>
+                  <a:lnTo>
+                    <a:pt x="0" y="3468624"/>
+                  </a:lnTo>
+                  <a:lnTo>
+                    <a:pt x="27431" y="3468624"/>
+                  </a:lnTo>
+                  <a:lnTo>
+                    <a:pt x="27431" y="0"/>
+                  </a:lnTo>
+                  <a:close/>
+                </a:path>
+              </a:pathLst>
+            </a:custGeom>
+            <a:solidFill>
+              <a:srgbClr val="1E3989"/>
+            </a:solidFill>
+          </p:spPr>
+          <p:txBody>
+            <a:bodyPr wrap="square" lIns="0" tIns="0" rIns="0" bIns="0" rtlCol="0"/>
+            <a:lstStyle/>
+            <a:p>
+              <a:endParaRPr>
+                <a:latin typeface="Raleway" pitchFamily="2" charset="77"/>
+                <a:cs typeface="Times New Roman" panose="02020603050405020304"/>
+              </a:endParaRPr>
+            </a:p>
+          </p:txBody>
+        </p:sp>
+      </p:grpSp>
+      <p:sp>
+        <p:nvSpPr>
+          <p:cNvPr id="7" name="object 7"/>
+          <p:cNvSpPr txBox="1"/>
+          <p:nvPr/>
+        </p:nvSpPr>
+        <p:spPr>
+          <a:xfrm>
+            <a:off x="240030" y="1217295"/>
+            <a:ext cx="5195570" cy="152400"/>
+          </a:xfrm>
+          <a:prstGeom prst="rect">
+            <a:avLst/>
+          </a:prstGeom>
+        </p:spPr>
+        <p:txBody>
+          <a:bodyPr vert="horz" wrap="square" lIns="0" tIns="14604" rIns="0" bIns="0" rtlCol="0" anchor="t">
+            <a:spAutoFit/>
+          </a:bodyPr>
+          <a:lstStyle/>
+          <a:p/>
+        </p:txBody>
+      </p:sp>
+      <p:sp>
+        <p:nvSpPr>
+          <p:cNvPr id="8" name="object 8"/>
+          <p:cNvSpPr/>
+          <p:nvPr/>
+        </p:nvSpPr>
+        <p:spPr>
+          <a:xfrm>
+            <a:off x="5486400" y="0"/>
+            <a:ext cx="3657600" cy="5148580"/>
+          </a:xfrm>
+          <a:custGeom>
+            <a:avLst/>
+            <a:gdLst/>
+            <a:ahLst/>
+            <a:cxnLst/>
+            <a:rect l="l" t="t" r="r" b="b"/>
+            <a:pathLst>
+              <a:path w="3657600" h="5148580">
+                <a:moveTo>
+                  <a:pt x="0" y="0"/>
+                </a:moveTo>
+                <a:lnTo>
+                  <a:pt x="0" y="5148071"/>
+                </a:lnTo>
+                <a:lnTo>
+                  <a:pt x="3657600" y="5148071"/>
+                </a:lnTo>
+                <a:lnTo>
+                  <a:pt x="3657600" y="3"/>
+                </a:lnTo>
+                <a:lnTo>
+                  <a:pt x="0" y="0"/>
+                </a:lnTo>
+                <a:close/>
+              </a:path>
+            </a:pathLst>
+          </a:custGeom>
+          <a:solidFill>
+            <a:srgbClr val="1E3989"/>
+          </a:solidFill>
+        </p:spPr>
+        <p:txBody>
+          <a:bodyPr wrap="square" lIns="0" tIns="0" rIns="0" bIns="0" rtlCol="0"/>
+          <a:lstStyle/>
+          <a:p/>
+        </p:txBody>
+      </p:sp>
+    </p:spTree>
+  </p:cSld>
+  <p:clrMapOvr>
+    <a:masterClrMapping/>
+  </p:clrMapOvr>
+</p:sld>
+</file>
+
+<file path=ppt/slides/slide2.xml><?xml version="1.0" encoding="utf-8"?>
 <p:sld xmlns:a="http://schemas.openxmlformats.org/drawingml/2006/main" xmlns:p="http://schemas.openxmlformats.org/presentationml/2006/main" xmlns:r="http://schemas.openxmlformats.org/officeDocument/2006/relationships">
   <p:cSld>
     <p:spTree>
